--- a/system-design-101/vi/lessons/sd-07-018/slides/sd-07-018.pptx
+++ b/system-design-101/vi/lessons/sd-07-018/slides/sd-07-018.pptx
@@ -4922,7 +4922,18 @@
                 <a:ea typeface="Be Vietnam Pro" pitchFamily="34" charset="-122"/>
                 <a:cs typeface="Be Vietnam Pro" pitchFamily="34" charset="-120"/>
               </a:rPr>
-              <a:t> thì đóng</a:t>
+              <a:t> thì</a:t>
+            </a:r>
+            <a:r>
+              <a:rPr lang="en-US" sz="2400" b="1" dirty="0" spc="0" kern="0">
+                <a:solidFill>
+                  <a:srgbClr val="14161C"/>
+                </a:solidFill>
+                <a:latin typeface="Be Vietnam Pro" pitchFamily="34" charset="0"/>
+                <a:ea typeface="Be Vietnam Pro" pitchFamily="34" charset="-122"/>
+                <a:cs typeface="Be Vietnam Pro" pitchFamily="34" charset="-120"/>
+              </a:rPr>
+              <a:t> giữ</a:t>
             </a:r>
             <a:r>
               <a:rPr lang="en-US" sz="2400" b="1" dirty="0" spc="-4" kern="0">
@@ -4933,10 +4944,10 @@
                 <a:ea typeface="Be Vietnam Pro" pitchFamily="34" charset="-122"/>
                 <a:cs typeface="Be Vietnam Pro" pitchFamily="34" charset="-120"/>
               </a:rPr>
-              <a:t> băng</a:t>
-            </a:r>
-            <a:r>
-              <a:rPr lang="en-US" sz="2400" b="1" dirty="0" spc="-2" kern="0">
+              <a:t> chỗ tiền</a:t>
+            </a:r>
+            <a:r>
+              <a:rPr lang="en-US" sz="2400" b="1" dirty="0" spc="-13" kern="0">
                 <a:solidFill>
                   <a:srgbClr val="14161C"/>
                 </a:solidFill>
@@ -4944,10 +4955,10 @@
                 <a:ea typeface="Be Vietnam Pro" pitchFamily="34" charset="-122"/>
                 <a:cs typeface="Be Vietnam Pro" pitchFamily="34" charset="-120"/>
               </a:rPr>
-              <a:t> tiền;</a:t>
-            </a:r>
-            <a:r>
-              <a:rPr lang="en-US" sz="2400" b="1" dirty="0" spc="3" kern="0">
+              <a:t> trong</a:t>
+            </a:r>
+            <a:r>
+              <a:rPr lang="en-US" sz="2400" b="1" dirty="0" spc="-1" kern="0">
                 <a:solidFill>
                   <a:srgbClr val="14161C"/>
                 </a:solidFill>
@@ -4955,10 +4966,32 @@
                 <a:ea typeface="Be Vietnam Pro" pitchFamily="34" charset="-122"/>
                 <a:cs typeface="Be Vietnam Pro" pitchFamily="34" charset="-120"/>
               </a:rPr>
+              <a:t> hạn</a:t>
+            </a:r>
+            <a:r>
+              <a:rPr lang="en-US" sz="2400" b="1" dirty="0" spc="12" kern="0">
+                <a:solidFill>
+                  <a:srgbClr val="14161C"/>
+                </a:solidFill>
+                <a:latin typeface="Be Vietnam Pro" pitchFamily="34" charset="0"/>
+                <a:ea typeface="Be Vietnam Pro" pitchFamily="34" charset="-122"/>
+                <a:cs typeface="Be Vietnam Pro" pitchFamily="34" charset="-120"/>
+              </a:rPr>
+              <a:t> mức;</a:t>
+            </a:r>
+            <a:r>
+              <a:rPr lang="en-US" sz="2400" b="1" dirty="0" spc="4" kern="0">
+                <a:solidFill>
+                  <a:srgbClr val="14161C"/>
+                </a:solidFill>
+                <a:latin typeface="Be Vietnam Pro" pitchFamily="34" charset="0"/>
+                <a:ea typeface="Be Vietnam Pro" pitchFamily="34" charset="-122"/>
+                <a:cs typeface="Be Vietnam Pro" pitchFamily="34" charset="-120"/>
+              </a:rPr>
               <a:t> báo</a:t>
             </a:r>
             <a:r>
-              <a:rPr lang="en-US" sz="2400" b="1" dirty="0" spc="-17" kern="0">
+              <a:rPr lang="en-US" sz="2400" b="1" dirty="0" spc="-30" kern="0">
                 <a:solidFill>
                   <a:srgbClr val="14161C"/>
                 </a:solidFill>
@@ -4966,10 +4999,10 @@
                 <a:ea typeface="Be Vietnam Pro" pitchFamily="34" charset="-122"/>
                 <a:cs typeface="Be Vietnam Pro" pitchFamily="34" charset="-120"/>
               </a:rPr>
-              <a:t> duyệt</a:t>
-            </a:r>
-            <a:r>
-              <a:rPr lang="en-US" sz="2400" b="1" dirty="0" spc="-2" kern="0">
+              <a:t> kết</a:t>
+            </a:r>
+            <a:r>
+              <a:rPr lang="en-US" sz="2400" b="1" dirty="0" spc="2" kern="0">
                 <a:solidFill>
                   <a:srgbClr val="14161C"/>
                 </a:solidFill>
@@ -4977,32 +5010,10 @@
                 <a:ea typeface="Be Vietnam Pro" pitchFamily="34" charset="-122"/>
                 <a:cs typeface="Be Vietnam Pro" pitchFamily="34" charset="-120"/>
               </a:rPr>
-              <a:t> hoặc</a:t>
-            </a:r>
-            <a:r>
-              <a:rPr lang="en-US" sz="2400" b="1" dirty="0" spc="3" kern="0">
-                <a:solidFill>
-                  <a:srgbClr val="14161C"/>
-                </a:solidFill>
-                <a:latin typeface="Be Vietnam Pro" pitchFamily="34" charset="0"/>
-                <a:ea typeface="Be Vietnam Pro" pitchFamily="34" charset="-122"/>
-                <a:cs typeface="Be Vietnam Pro" pitchFamily="34" charset="-120"/>
-              </a:rPr>
-              <a:t> từ</a:t>
-            </a:r>
-            <a:r>
-              <a:rPr lang="en-US" sz="2400" b="1" dirty="0" spc="-3" kern="0">
-                <a:solidFill>
-                  <a:srgbClr val="14161C"/>
-                </a:solidFill>
-                <a:latin typeface="Be Vietnam Pro" pitchFamily="34" charset="0"/>
-                <a:ea typeface="Be Vietnam Pro" pitchFamily="34" charset="-122"/>
-                <a:cs typeface="Be Vietnam Pro" pitchFamily="34" charset="-120"/>
-              </a:rPr>
-              <a:t> chối</a:t>
-            </a:r>
-            <a:r>
-              <a:rPr lang="en-US" sz="2400" b="1" dirty="0" spc="-16" kern="0">
+              <a:t> quả</a:t>
+            </a:r>
+            <a:r>
+              <a:rPr lang="en-US" sz="2400" b="1" dirty="0" spc="-15" kern="0">
                 <a:solidFill>
                   <a:srgbClr val="14161C"/>
                 </a:solidFill>
@@ -5569,7 +5580,7 @@
               <a:buNone/>
             </a:pPr>
             <a:r>
-              <a:rPr lang="en-US" sz="6900" dirty="0" spc="6" kern="0">
+              <a:rPr lang="en-US" sz="6900" dirty="0" spc="-5" kern="0">
                 <a:solidFill>
                   <a:srgbClr val="14161C"/>
                 </a:solidFill>
@@ -5577,10 +5588,10 @@
                 <a:ea typeface="Bricolage Grotesque ExtraBold" pitchFamily="34" charset="-122"/>
                 <a:cs typeface="Bricolage Grotesque ExtraBold" pitchFamily="34" charset="-120"/>
               </a:rPr>
-              <a:t>Cuối</a:t>
-            </a:r>
-            <a:r>
-              <a:rPr lang="en-US" sz="6900" dirty="0" spc="-18" kern="0">
+              <a:t>Chốt</a:t>
+            </a:r>
+            <a:r>
+              <a:rPr lang="en-US" sz="6900" dirty="0" spc="1" kern="0">
                 <a:solidFill>
                   <a:srgbClr val="14161C"/>
                 </a:solidFill>
@@ -5588,10 +5599,10 @@
                 <a:ea typeface="Bricolage Grotesque ExtraBold" pitchFamily="34" charset="-122"/>
                 <a:cs typeface="Bricolage Grotesque ExtraBold" pitchFamily="34" charset="-120"/>
               </a:rPr>
-              <a:t> ngày,</a:t>
-            </a:r>
-            <a:r>
-              <a:rPr lang="en-US" sz="6900" dirty="0" spc="6" kern="0">
+              <a:t> cuối</a:t>
+            </a:r>
+            <a:r>
+              <a:rPr lang="en-US" sz="6900" dirty="0" spc="-18" kern="0">
                 <a:solidFill>
                   <a:srgbClr val="14161C"/>
                 </a:solidFill>
@@ -5599,10 +5610,10 @@
                 <a:ea typeface="Bricolage Grotesque ExtraBold" pitchFamily="34" charset="-122"/>
                 <a:cs typeface="Bricolage Grotesque ExtraBold" pitchFamily="34" charset="-120"/>
               </a:rPr>
-              <a:t> tiền</a:t>
-            </a:r>
-            <a:r>
-              <a:rPr lang="en-US" sz="6900" dirty="0" spc="-34" kern="0">
+              <a:t> ngày,</a:t>
+            </a:r>
+            <a:r>
+              <a:rPr lang="en-US" sz="6900" dirty="0" spc="5" kern="0">
                 <a:solidFill>
                   <a:srgbClr val="14161C"/>
                 </a:solidFill>
@@ -5610,7 +5621,7 @@
                 <a:ea typeface="Bricolage Grotesque ExtraBold" pitchFamily="34" charset="-122"/>
                 <a:cs typeface="Bricolage Grotesque ExtraBold" pitchFamily="34" charset="-120"/>
               </a:rPr>
-              <a:t> mới</a:t>
+              <a:t> tiền</a:t>
             </a:r>
             <a:r>
               <a:rPr lang="en-US" sz="6900" dirty="0" spc="36" kern="0">
@@ -5622,6 +5633,17 @@
                 <a:cs typeface="Bricolage Grotesque ExtraBold" pitchFamily="34" charset="-120"/>
               </a:rPr>
               <a:t> đi</a:t>
+            </a:r>
+            <a:r>
+              <a:rPr lang="en-US" sz="6900" dirty="0" spc="2" kern="0">
+                <a:solidFill>
+                  <a:srgbClr val="14161C"/>
+                </a:solidFill>
+                <a:latin typeface="Bricolage Grotesque ExtraBold" pitchFamily="34" charset="0"/>
+                <a:ea typeface="Bricolage Grotesque ExtraBold" pitchFamily="34" charset="-122"/>
+                <a:cs typeface="Bricolage Grotesque ExtraBold" pitchFamily="34" charset="-120"/>
+              </a:rPr>
+              <a:t> sau</a:t>
             </a:r>
             <a:endParaRPr lang="en-US" sz="6900" dirty="0"/>
           </a:p>
@@ -6480,6 +6502,72 @@
               <a:buNone/>
             </a:pPr>
             <a:r>
+              <a:rPr lang="en-US" sz="2550" b="1" dirty="0" spc="2" kern="0">
+                <a:solidFill>
+                  <a:srgbClr val="F3EEE3"/>
+                </a:solidFill>
+                <a:latin typeface="Be Vietnam Pro" pitchFamily="34" charset="0"/>
+                <a:ea typeface="Be Vietnam Pro" pitchFamily="34" charset="-122"/>
+                <a:cs typeface="Be Vietnam Pro" pitchFamily="34" charset="-120"/>
+              </a:rPr>
+              <a:t>Đi</a:t>
+            </a:r>
+            <a:r>
+              <a:rPr lang="en-US" sz="2550" b="1" dirty="0" spc="-4" kern="0">
+                <a:solidFill>
+                  <a:srgbClr val="F3EEE3"/>
+                </a:solidFill>
+                <a:latin typeface="Be Vietnam Pro" pitchFamily="34" charset="0"/>
+                <a:ea typeface="Be Vietnam Pro" pitchFamily="34" charset="-122"/>
+                <a:cs typeface="Be Vietnam Pro" pitchFamily="34" charset="-120"/>
+              </a:rPr>
+              <a:t> theo</a:t>
+            </a:r>
+            <a:r>
+              <a:rPr lang="en-US" sz="2550" b="1" dirty="0" spc="-3" kern="0">
+                <a:solidFill>
+                  <a:srgbClr val="F3EEE3"/>
+                </a:solidFill>
+                <a:latin typeface="Be Vietnam Pro" pitchFamily="34" charset="0"/>
+                <a:ea typeface="Be Vietnam Pro" pitchFamily="34" charset="-122"/>
+                <a:cs typeface="Be Vietnam Pro" pitchFamily="34" charset="-120"/>
+              </a:rPr>
+              <a:t> lô.</a:t>
+            </a:r>
+            <a:r>
+              <a:rPr lang="en-US" sz="2550" b="1" dirty="0" spc="-5" kern="0">
+                <a:solidFill>
+                  <a:srgbClr val="F3EEE3"/>
+                </a:solidFill>
+                <a:latin typeface="Be Vietnam Pro" pitchFamily="34" charset="0"/>
+                <a:ea typeface="Be Vietnam Pro" pitchFamily="34" charset="-122"/>
+                <a:cs typeface="Be Vietnam Pro" pitchFamily="34" charset="-120"/>
+              </a:rPr>
+              <a:t> Nguồn</a:t>
+            </a:r>
+            <a:r>
+              <a:rPr lang="en-US" sz="2550" b="1" dirty="0" spc="-20" kern="0">
+                <a:solidFill>
+                  <a:srgbClr val="F3EEE3"/>
+                </a:solidFill>
+                <a:latin typeface="Be Vietnam Pro" pitchFamily="34" charset="0"/>
+                <a:ea typeface="Be Vietnam Pro" pitchFamily="34" charset="-122"/>
+                <a:cs typeface="Be Vietnam Pro" pitchFamily="34" charset="-120"/>
+              </a:rPr>
+              <a:t> vẽ</a:t>
+            </a:r>
+            <a:r>
+              <a:rPr lang="en-US" sz="2550" b="1" dirty="0" spc="4" kern="0">
+                <a:solidFill>
+                  <a:srgbClr val="F3EEE3"/>
+                </a:solidFill>
+                <a:latin typeface="Be Vietnam Pro" pitchFamily="34" charset="0"/>
+                <a:ea typeface="Be Vietnam Pro" pitchFamily="34" charset="-122"/>
+                <a:cs typeface="Be Vietnam Pro" pitchFamily="34" charset="-120"/>
+              </a:rPr>
+              <a:t> giản</a:t>
+            </a:r>
+            <a:r>
               <a:rPr lang="en-US" sz="2550" b="1" dirty="0" spc="8" kern="0">
                 <a:solidFill>
                   <a:srgbClr val="F3EEE3"/>
@@ -6488,40 +6576,73 @@
                 <a:ea typeface="Be Vietnam Pro" pitchFamily="34" charset="-122"/>
                 <a:cs typeface="Be Vietnam Pro" pitchFamily="34" charset="-120"/>
               </a:rPr>
-              <a:t>Các</a:t>
-            </a:r>
-            <a:r>
-              <a:rPr lang="en-US" sz="2550" b="1" dirty="0" spc="6" kern="0">
-                <a:solidFill>
-                  <a:srgbClr val="F3EEE3"/>
-                </a:solidFill>
-                <a:latin typeface="Be Vietnam Pro" pitchFamily="34" charset="0"/>
-                <a:ea typeface="Be Vietnam Pro" pitchFamily="34" charset="-122"/>
-                <a:cs typeface="Be Vietnam Pro" pitchFamily="34" charset="-120"/>
-              </a:rPr>
-              <a:t> giao</a:t>
-            </a:r>
-            <a:r>
-              <a:rPr lang="en-US" sz="2550" b="1" dirty="0" spc="0" kern="0">
-                <a:solidFill>
-                  <a:srgbClr val="F3EEE3"/>
-                </a:solidFill>
-                <a:latin typeface="Be Vietnam Pro" pitchFamily="34" charset="0"/>
-                <a:ea typeface="Be Vietnam Pro" pitchFamily="34" charset="-122"/>
-                <a:cs typeface="Be Vietnam Pro" pitchFamily="34" charset="-120"/>
-              </a:rPr>
-              <a:t> dịch</a:t>
-            </a:r>
-            <a:r>
-              <a:rPr lang="en-US" sz="2550" b="1" dirty="0" spc="24" kern="0">
-                <a:solidFill>
-                  <a:srgbClr val="F3EEE3"/>
-                </a:solidFill>
-                <a:latin typeface="Be Vietnam Pro" pitchFamily="34" charset="0"/>
-                <a:ea typeface="Be Vietnam Pro" pitchFamily="34" charset="-122"/>
-                <a:cs typeface="Be Vietnam Pro" pitchFamily="34" charset="-120"/>
-              </a:rPr>
-              <a:t> đi</a:t>
+              <a:t> lược;</a:t>
+            </a:r>
+            <a:r>
+              <a:rPr lang="en-US" sz="2550" b="1" dirty="0" spc="11" kern="0">
+                <a:solidFill>
+                  <a:srgbClr val="F3EEE3"/>
+                </a:solidFill>
+                <a:latin typeface="Be Vietnam Pro" pitchFamily="34" charset="0"/>
+                <a:ea typeface="Be Vietnam Pro" pitchFamily="34" charset="-122"/>
+                <a:cs typeface="Be Vietnam Pro" pitchFamily="34" charset="-120"/>
+              </a:rPr>
+              <a:t> thực</a:t>
+            </a:r>
+            <a:r>
+              <a:rPr lang="en-US" sz="2550" b="1" dirty="0" spc="-5" kern="0">
+                <a:solidFill>
+                  <a:srgbClr val="F3EEE3"/>
+                </a:solidFill>
+                <a:latin typeface="Be Vietnam Pro" pitchFamily="34" charset="0"/>
+                <a:ea typeface="Be Vietnam Pro" pitchFamily="34" charset="-122"/>
+                <a:cs typeface="Be Vietnam Pro" pitchFamily="34" charset="-120"/>
+              </a:rPr>
+              <a:t> tế</a:t>
+            </a:r>
+            <a:r>
+              <a:rPr lang="en-US" sz="2550" b="1" dirty="0" spc="1" kern="0">
+                <a:solidFill>
+                  <a:srgbClr val="F3EEE3"/>
+                </a:solidFill>
+                <a:latin typeface="Be Vietnam Pro" pitchFamily="34" charset="0"/>
+                <a:ea typeface="Be Vietnam Pro" pitchFamily="34" charset="-122"/>
+                <a:cs typeface="Be Vietnam Pro" pitchFamily="34" charset="-120"/>
+              </a:rPr>
+              <a:t> qua</a:t>
+            </a:r>
+            <a:r>
+              <a:rPr lang="en-US" sz="2550" b="1" dirty="0" spc="-5" kern="0">
+                <a:solidFill>
+                  <a:srgbClr val="F3EEE3"/>
+                </a:solidFill>
+                <a:latin typeface="Be Vietnam Pro" pitchFamily="34" charset="0"/>
+                <a:ea typeface="Be Vietnam Pro" pitchFamily="34" charset="-122"/>
+                <a:cs typeface="Be Vietnam Pro" pitchFamily="34" charset="-120"/>
+              </a:rPr>
+              <a:t> hệ</a:t>
+            </a:r>
+            <a:r>
+              <a:rPr lang="en-US" sz="2550" b="1" dirty="0" spc="-6" kern="0">
+                <a:solidFill>
+                  <a:srgbClr val="F3EEE3"/>
+                </a:solidFill>
+                <a:latin typeface="Be Vietnam Pro" pitchFamily="34" charset="0"/>
+                <a:ea typeface="Be Vietnam Pro" pitchFamily="34" charset="-122"/>
+                <a:cs typeface="Be Vietnam Pro" pitchFamily="34" charset="-120"/>
+              </a:rPr>
+              <a:t> thống</a:t>
+            </a:r>
+            <a:r>
+              <a:rPr lang="en-US" sz="2550" b="1" dirty="0" spc="1" kern="0">
+                <a:solidFill>
+                  <a:srgbClr val="F3EEE3"/>
+                </a:solidFill>
+                <a:latin typeface="Be Vietnam Pro" pitchFamily="34" charset="0"/>
+                <a:ea typeface="Be Vietnam Pro" pitchFamily="34" charset="-122"/>
+                <a:cs typeface="Be Vietnam Pro" pitchFamily="34" charset="-120"/>
+              </a:rPr>
+              <a:t> của</a:t>
             </a:r>
             <a:r>
               <a:rPr lang="en-US" sz="2550" b="1" dirty="0" spc="-4" kern="0">
@@ -6532,51 +6653,18 @@
                 <a:ea typeface="Be Vietnam Pro" pitchFamily="34" charset="-122"/>
                 <a:cs typeface="Be Vietnam Pro" pitchFamily="34" charset="-120"/>
               </a:rPr>
-              <a:t> theo</a:t>
-            </a:r>
-            <a:r>
-              <a:rPr lang="en-US" sz="2550" b="1" dirty="0" spc="-6" kern="0">
-                <a:solidFill>
-                  <a:srgbClr val="F3EEE3"/>
-                </a:solidFill>
-                <a:latin typeface="Be Vietnam Pro" pitchFamily="34" charset="0"/>
-                <a:ea typeface="Be Vietnam Pro" pitchFamily="34" charset="-122"/>
-                <a:cs typeface="Be Vietnam Pro" pitchFamily="34" charset="-120"/>
-              </a:rPr>
-              <a:t> lô, không</a:t>
-            </a:r>
-            <a:r>
-              <a:rPr lang="en-US" sz="2550" b="1" dirty="0" spc="-4" kern="0">
-                <a:solidFill>
-                  <a:srgbClr val="F3EEE3"/>
-                </a:solidFill>
-                <a:latin typeface="Be Vietnam Pro" pitchFamily="34" charset="0"/>
-                <a:ea typeface="Be Vietnam Pro" pitchFamily="34" charset="-122"/>
-                <a:cs typeface="Be Vietnam Pro" pitchFamily="34" charset="-120"/>
-              </a:rPr>
-              <a:t> theo</a:t>
-            </a:r>
-            <a:r>
-              <a:rPr lang="en-US" sz="2550" b="1" dirty="0" spc="24" kern="0">
-                <a:solidFill>
-                  <a:srgbClr val="F3EEE3"/>
-                </a:solidFill>
-                <a:latin typeface="Be Vietnam Pro" pitchFamily="34" charset="0"/>
-                <a:ea typeface="Be Vietnam Pro" pitchFamily="34" charset="-122"/>
-                <a:cs typeface="Be Vietnam Pro" pitchFamily="34" charset="-120"/>
-              </a:rPr>
-              <a:t> từng</a:t>
-            </a:r>
-            <a:r>
-              <a:rPr lang="en-US" sz="2550" b="1" dirty="0" spc="2" kern="0">
-                <a:solidFill>
-                  <a:srgbClr val="F3EEE3"/>
-                </a:solidFill>
-                <a:latin typeface="Be Vietnam Pro" pitchFamily="34" charset="0"/>
-                <a:ea typeface="Be Vietnam Pro" pitchFamily="34" charset="-122"/>
-                <a:cs typeface="Be Vietnam Pro" pitchFamily="34" charset="-120"/>
-              </a:rPr>
-              <a:t> cái.</a:t>
+              <a:t> mạng</a:t>
+            </a:r>
+            <a:r>
+              <a:rPr lang="en-US" sz="2550" b="1" dirty="0" spc="-1" kern="0">
+                <a:solidFill>
+                  <a:srgbClr val="F3EEE3"/>
+                </a:solidFill>
+                <a:latin typeface="Be Vietnam Pro" pitchFamily="34" charset="0"/>
+                <a:ea typeface="Be Vietnam Pro" pitchFamily="34" charset="-122"/>
+                <a:cs typeface="Be Vietnam Pro" pitchFamily="34" charset="-120"/>
+              </a:rPr>
+              <a:t> thẻ.</a:t>
             </a:r>
             <a:endParaRPr lang="en-US" sz="2550" dirty="0"/>
           </a:p>
@@ -7366,10 +7454,10 @@
                 <a:ea typeface="Bricolage Grotesque ExtraBold" pitchFamily="34" charset="-122"/>
                 <a:cs typeface="Bricolage Grotesque ExtraBold" pitchFamily="34" charset="-120"/>
               </a:rPr>
-              <a:t> số giao</a:t>
-            </a:r>
-            <a:r>
-              <a:rPr lang="en-US" sz="4500" dirty="0" spc="3" kern="0">
+              <a:t> số</a:t>
+            </a:r>
+            <a:r>
+              <a:rPr lang="en-US" sz="4500" dirty="0" spc="-1" kern="0">
                 <a:solidFill>
                   <a:srgbClr val="F3EEE3"/>
                 </a:solidFill>
@@ -7377,10 +7465,32 @@
                 <a:ea typeface="Bricolage Grotesque ExtraBold" pitchFamily="34" charset="-122"/>
                 <a:cs typeface="Bricolage Grotesque ExtraBold" pitchFamily="34" charset="-120"/>
               </a:rPr>
-              <a:t> dịch</a:t>
-            </a:r>
-            <a:r>
-              <a:rPr lang="en-US" sz="4500" dirty="0" spc="0" kern="0">
+              <a:t> khoản</a:t>
+            </a:r>
+            <a:r>
+              <a:rPr lang="en-US" sz="4500" dirty="0" spc="4" kern="0">
+                <a:solidFill>
+                  <a:srgbClr val="F3EEE3"/>
+                </a:solidFill>
+                <a:latin typeface="Bricolage Grotesque ExtraBold" pitchFamily="34" charset="0"/>
+                <a:ea typeface="Bricolage Grotesque ExtraBold" pitchFamily="34" charset="-122"/>
+                <a:cs typeface="Bricolage Grotesque ExtraBold" pitchFamily="34" charset="-120"/>
+              </a:rPr>
+              <a:t> phải</a:t>
+            </a:r>
+            <a:r>
+              <a:rPr lang="en-US" sz="4500" dirty="0" spc="2" kern="0">
+                <a:solidFill>
+                  <a:srgbClr val="F3EEE3"/>
+                </a:solidFill>
+                <a:latin typeface="Bricolage Grotesque ExtraBold" pitchFamily="34" charset="0"/>
+                <a:ea typeface="Bricolage Grotesque ExtraBold" pitchFamily="34" charset="-122"/>
+                <a:cs typeface="Bricolage Grotesque ExtraBold" pitchFamily="34" charset="-120"/>
+              </a:rPr>
+              <a:t> chuyển</a:t>
+            </a:r>
+            <a:r>
+              <a:rPr lang="en-US" sz="4500" dirty="0" spc="1" kern="0">
                 <a:solidFill>
                   <a:srgbClr val="F3EEE3"/>
                 </a:solidFill>
@@ -9701,17 +9811,6 @@
               <a:t> hành</a:t>
             </a:r>
             <a:r>
-              <a:rPr lang="en-US" sz="2550" dirty="0" spc="10" kern="0">
-                <a:solidFill>
-                  <a:srgbClr val="F3EEE3"/>
-                </a:solidFill>
-                <a:latin typeface="Be Vietnam Pro" pitchFamily="34" charset="0"/>
-                <a:ea typeface="Be Vietnam Pro" pitchFamily="34" charset="-122"/>
-                <a:cs typeface="Be Vietnam Pro" pitchFamily="34" charset="-120"/>
-              </a:rPr>
-              <a:t> đóng</a:t>
-            </a:r>
-            <a:r>
               <a:rPr lang="en-US" sz="2550" dirty="0" spc="-2" kern="0">
                 <a:solidFill>
                   <a:srgbClr val="F3EEE3"/>
@@ -9720,7 +9819,18 @@
                 <a:ea typeface="Be Vietnam Pro" pitchFamily="34" charset="-122"/>
                 <a:cs typeface="Be Vietnam Pro" pitchFamily="34" charset="-120"/>
               </a:rPr>
-              <a:t> băng</a:t>
+              <a:t> giữ</a:t>
+            </a:r>
+            <a:r>
+              <a:rPr lang="en-US" sz="2550" dirty="0" spc="0" kern="0">
+                <a:solidFill>
+                  <a:srgbClr val="F3EEE3"/>
+                </a:solidFill>
+                <a:latin typeface="Be Vietnam Pro" pitchFamily="34" charset="0"/>
+                <a:ea typeface="Be Vietnam Pro" pitchFamily="34" charset="-122"/>
+                <a:cs typeface="Be Vietnam Pro" pitchFamily="34" charset="-120"/>
+              </a:rPr>
+              <a:t> chỗ</a:t>
             </a:r>
             <a:r>
               <a:rPr lang="en-US" sz="2550" dirty="0" spc="1" kern="0">
@@ -9731,7 +9841,40 @@
                 <a:ea typeface="Be Vietnam Pro" pitchFamily="34" charset="-122"/>
                 <a:cs typeface="Be Vietnam Pro" pitchFamily="34" charset="-120"/>
               </a:rPr>
-              <a:t> tiền.</a:t>
+              <a:t> tiền</a:t>
+            </a:r>
+            <a:r>
+              <a:rPr lang="en-US" sz="2550" dirty="0" spc="-17" kern="0">
+                <a:solidFill>
+                  <a:srgbClr val="F3EEE3"/>
+                </a:solidFill>
+                <a:latin typeface="Be Vietnam Pro" pitchFamily="34" charset="0"/>
+                <a:ea typeface="Be Vietnam Pro" pitchFamily="34" charset="-122"/>
+                <a:cs typeface="Be Vietnam Pro" pitchFamily="34" charset="-120"/>
+              </a:rPr>
+              <a:t> trong</a:t>
+            </a:r>
+            <a:r>
+              <a:rPr lang="en-US" sz="2550" dirty="0" spc="0" kern="0">
+                <a:solidFill>
+                  <a:srgbClr val="F3EEE3"/>
+                </a:solidFill>
+                <a:latin typeface="Be Vietnam Pro" pitchFamily="34" charset="0"/>
+                <a:ea typeface="Be Vietnam Pro" pitchFamily="34" charset="-122"/>
+                <a:cs typeface="Be Vietnam Pro" pitchFamily="34" charset="-120"/>
+              </a:rPr>
+              <a:t> hạn</a:t>
+            </a:r>
+            <a:r>
+              <a:rPr lang="en-US" sz="2550" dirty="0" spc="8" kern="0">
+                <a:solidFill>
+                  <a:srgbClr val="F3EEE3"/>
+                </a:solidFill>
+                <a:latin typeface="Be Vietnam Pro" pitchFamily="34" charset="0"/>
+                <a:ea typeface="Be Vietnam Pro" pitchFamily="34" charset="-122"/>
+                <a:cs typeface="Be Vietnam Pro" pitchFamily="34" charset="-120"/>
+              </a:rPr>
+              <a:t> mức.</a:t>
             </a:r>
             <a:endParaRPr lang="en-US" sz="2550" dirty="0"/>
           </a:p>
@@ -9789,7 +9932,7 @@
               <a:buNone/>
             </a:pPr>
             <a:r>
-              <a:rPr lang="en-US" sz="2100" b="1" spc="225" kern="0" dirty="0">
+              <a:rPr lang="en-US" sz="2100" b="1" spc="202" kern="0" dirty="0">
                 <a:solidFill>
                   <a:srgbClr val="3DD6A0"/>
                 </a:solidFill>
@@ -9797,7 +9940,18 @@
                 <a:ea typeface="Be Vietnam Pro" pitchFamily="34" charset="-122"/>
                 <a:cs typeface="Be Vietnam Pro" pitchFamily="34" charset="-120"/>
               </a:rPr>
-              <a:t>CUỐI</a:t>
+              <a:t>CHỐT</a:t>
+            </a:r>
+            <a:r>
+              <a:rPr lang="en-US" sz="2100" b="1" spc="224" kern="0" dirty="0">
+                <a:solidFill>
+                  <a:srgbClr val="3DD6A0"/>
+                </a:solidFill>
+                <a:latin typeface="Be Vietnam Pro" pitchFamily="34" charset="0"/>
+                <a:ea typeface="Be Vietnam Pro" pitchFamily="34" charset="-122"/>
+                <a:cs typeface="Be Vietnam Pro" pitchFamily="34" charset="-120"/>
+              </a:rPr>
+              <a:t> CUỐI</a:t>
             </a:r>
             <a:r>
               <a:rPr lang="en-US" sz="2100" b="1" spc="189" kern="0" dirty="0">
@@ -9811,7 +9965,7 @@
               <a:t> NGÀY:</a:t>
             </a:r>
             <a:r>
-              <a:rPr lang="en-US" sz="2100" b="1" spc="224" kern="0" dirty="0">
+              <a:rPr lang="en-US" sz="2100" b="1" spc="222" kern="0" dirty="0">
                 <a:solidFill>
                   <a:srgbClr val="3DD6A0"/>
                 </a:solidFill>
@@ -9819,10 +9973,10 @@
                 <a:ea typeface="Be Vietnam Pro" pitchFamily="34" charset="-122"/>
                 <a:cs typeface="Be Vietnam Pro" pitchFamily="34" charset="-120"/>
               </a:rPr>
-              <a:t> MỚI</a:t>
-            </a:r>
-            <a:r>
-              <a:rPr lang="en-US" sz="2100" b="1" spc="226" kern="0" dirty="0">
+              <a:t> TIỀN ĐI</a:t>
+            </a:r>
+            <a:r>
+              <a:rPr lang="en-US" sz="2100" b="1" spc="210" kern="0" dirty="0">
                 <a:solidFill>
                   <a:srgbClr val="3DD6A0"/>
                 </a:solidFill>
@@ -9830,7 +9984,7 @@
                 <a:ea typeface="Be Vietnam Pro" pitchFamily="34" charset="-122"/>
                 <a:cs typeface="Be Vietnam Pro" pitchFamily="34" charset="-120"/>
               </a:rPr>
-              <a:t> CHUYỂN</a:t>
+              <a:t> SAU</a:t>
             </a:r>
             <a:endParaRPr lang="en-US" sz="2100" dirty="0"/>
           </a:p>
